--- a/Assets/Docs/update history.pptx
+++ b/Assets/Docs/update history.pptx
@@ -254,7 +254,7 @@
           <a:p>
             <a:fld id="{4FBA4FEC-236F-4868-8F03-87BECBE3AFDA}" type="datetimeFigureOut">
               <a:rPr lang="en-US" smtClean="0"/>
-              <a:t>8/5/2025</a:t>
+              <a:t>8/9/2025</a:t>
             </a:fld>
             <a:endParaRPr lang="en-US"/>
           </a:p>
@@ -424,7 +424,7 @@
           <a:p>
             <a:fld id="{4FBA4FEC-236F-4868-8F03-87BECBE3AFDA}" type="datetimeFigureOut">
               <a:rPr lang="en-US" smtClean="0"/>
-              <a:t>8/5/2025</a:t>
+              <a:t>8/9/2025</a:t>
             </a:fld>
             <a:endParaRPr lang="en-US"/>
           </a:p>
@@ -604,7 +604,7 @@
           <a:p>
             <a:fld id="{4FBA4FEC-236F-4868-8F03-87BECBE3AFDA}" type="datetimeFigureOut">
               <a:rPr lang="en-US" smtClean="0"/>
-              <a:t>8/5/2025</a:t>
+              <a:t>8/9/2025</a:t>
             </a:fld>
             <a:endParaRPr lang="en-US"/>
           </a:p>
@@ -774,7 +774,7 @@
           <a:p>
             <a:fld id="{4FBA4FEC-236F-4868-8F03-87BECBE3AFDA}" type="datetimeFigureOut">
               <a:rPr lang="en-US" smtClean="0"/>
-              <a:t>8/5/2025</a:t>
+              <a:t>8/9/2025</a:t>
             </a:fld>
             <a:endParaRPr lang="en-US"/>
           </a:p>
@@ -1018,7 +1018,7 @@
           <a:p>
             <a:fld id="{4FBA4FEC-236F-4868-8F03-87BECBE3AFDA}" type="datetimeFigureOut">
               <a:rPr lang="en-US" smtClean="0"/>
-              <a:t>8/5/2025</a:t>
+              <a:t>8/9/2025</a:t>
             </a:fld>
             <a:endParaRPr lang="en-US"/>
           </a:p>
@@ -1250,7 +1250,7 @@
           <a:p>
             <a:fld id="{4FBA4FEC-236F-4868-8F03-87BECBE3AFDA}" type="datetimeFigureOut">
               <a:rPr lang="en-US" smtClean="0"/>
-              <a:t>8/5/2025</a:t>
+              <a:t>8/9/2025</a:t>
             </a:fld>
             <a:endParaRPr lang="en-US"/>
           </a:p>
@@ -1617,7 +1617,7 @@
           <a:p>
             <a:fld id="{4FBA4FEC-236F-4868-8F03-87BECBE3AFDA}" type="datetimeFigureOut">
               <a:rPr lang="en-US" smtClean="0"/>
-              <a:t>8/5/2025</a:t>
+              <a:t>8/9/2025</a:t>
             </a:fld>
             <a:endParaRPr lang="en-US"/>
           </a:p>
@@ -1735,7 +1735,7 @@
           <a:p>
             <a:fld id="{4FBA4FEC-236F-4868-8F03-87BECBE3AFDA}" type="datetimeFigureOut">
               <a:rPr lang="en-US" smtClean="0"/>
-              <a:t>8/5/2025</a:t>
+              <a:t>8/9/2025</a:t>
             </a:fld>
             <a:endParaRPr lang="en-US"/>
           </a:p>
@@ -1830,7 +1830,7 @@
           <a:p>
             <a:fld id="{4FBA4FEC-236F-4868-8F03-87BECBE3AFDA}" type="datetimeFigureOut">
               <a:rPr lang="en-US" smtClean="0"/>
-              <a:t>8/5/2025</a:t>
+              <a:t>8/9/2025</a:t>
             </a:fld>
             <a:endParaRPr lang="en-US"/>
           </a:p>
@@ -2107,7 +2107,7 @@
           <a:p>
             <a:fld id="{4FBA4FEC-236F-4868-8F03-87BECBE3AFDA}" type="datetimeFigureOut">
               <a:rPr lang="en-US" smtClean="0"/>
-              <a:t>8/5/2025</a:t>
+              <a:t>8/9/2025</a:t>
             </a:fld>
             <a:endParaRPr lang="en-US"/>
           </a:p>
@@ -2364,7 +2364,7 @@
           <a:p>
             <a:fld id="{4FBA4FEC-236F-4868-8F03-87BECBE3AFDA}" type="datetimeFigureOut">
               <a:rPr lang="en-US" smtClean="0"/>
-              <a:t>8/5/2025</a:t>
+              <a:t>8/9/2025</a:t>
             </a:fld>
             <a:endParaRPr lang="en-US"/>
           </a:p>
@@ -2577,7 +2577,7 @@
           <a:p>
             <a:fld id="{4FBA4FEC-236F-4868-8F03-87BECBE3AFDA}" type="datetimeFigureOut">
               <a:rPr lang="en-US" smtClean="0"/>
-              <a:t>8/5/2025</a:t>
+              <a:t>8/9/2025</a:t>
             </a:fld>
             <a:endParaRPr lang="en-US"/>
           </a:p>
@@ -3659,7 +3659,7 @@
           <p:nvPr>
             <p:extLst>
               <p:ext uri="{D42A27DB-BD31-4B8C-83A1-F6EECF244321}">
-                <p14:modId xmlns:p14="http://schemas.microsoft.com/office/powerpoint/2010/main" val="3359955381"/>
+                <p14:modId xmlns:p14="http://schemas.microsoft.com/office/powerpoint/2010/main" val="2409318337"/>
               </p:ext>
             </p:extLst>
           </p:nvPr>
@@ -6241,7 +6241,7 @@
                         <a:rPr lang="en-US" sz="800" dirty="0">
                           <a:latin typeface="Aptos" panose="020B0004020202020204" pitchFamily="34" charset="0"/>
                         </a:rPr>
-                        <a:t>✖</a:t>
+                        <a:t>✔</a:t>
                       </a:r>
                     </a:p>
                   </a:txBody>
@@ -6380,7 +6380,7 @@
                 </a:solidFill>
                 <a:latin typeface="Aptos" panose="020B0004020202020204" pitchFamily="34" charset="0"/>
               </a:rPr>
-              <a:t>LKR: 0.00</a:t>
+              <a:t>LKR: 8,000.00</a:t>
             </a:r>
             <a:endParaRPr lang="en-US" sz="1000" dirty="0">
               <a:solidFill>
@@ -6574,7 +6574,7 @@
                 </a:solidFill>
                 <a:latin typeface="Aptos" panose="020B0004020202020204" pitchFamily="34" charset="0"/>
               </a:rPr>
-              <a:t>LKR: 8,000.00</a:t>
+              <a:t>LKR: 0.00</a:t>
             </a:r>
             <a:endParaRPr lang="en-US" sz="1000" b="1" dirty="0">
               <a:solidFill>
